--- a/curso/pptx/S79.pptx
+++ b/curso/pptx/S79.pptx
@@ -4935,7 +4935,7 @@
                 </a:solidFill>
                 <a:latin typeface="Nunito Sans"/>
               </a:rPr>
-              <a:t>Los celos como prueba de amor</a:t>
+              <a:t>把嫉妒当作爱的证明</a:t>
             </a:r>
           </a:p>
           <a:p>
@@ -4960,7 +4960,7 @@
                 </a:solidFill>
                 <a:latin typeface="Nunito Sans"/>
               </a:rPr>
-              <a:t>Revisar el móvil y pedir contraseñas</a:t>
+              <a:t>检查手机、要密码</a:t>
             </a:r>
           </a:p>
           <a:p>
@@ -4985,7 +4985,7 @@
                 </a:solidFill>
                 <a:latin typeface="Nunito Sans"/>
               </a:rPr>
-              <a:t>Separarte de tu cuadrilla</a:t>
+              <a:t>让你远离你的朋友圈</a:t>
             </a:r>
           </a:p>
         </p:txBody>
@@ -5115,7 +5115,7 @@
                 </a:solidFill>
                 <a:latin typeface="Nunito Sans"/>
               </a:rPr>
-              <a:t>Respeto:</a:t>
+              <a:t>尊重：</a:t>
             </a:r>
             <a:r>
               <a:rPr sz="2600" b="0">
@@ -5124,7 +5124,7 @@
                 </a:solidFill>
                 <a:latin typeface="Nunito Sans"/>
               </a:rPr>
-              <a:t> tus decisiones y tus límites cuentan</a:t>
+              <a:t>你的决定和你的界限都算数</a:t>
             </a:r>
           </a:p>
           <a:p>
@@ -5149,7 +5149,7 @@
                 </a:solidFill>
                 <a:latin typeface="Nunito Sans"/>
               </a:rPr>
-              <a:t>Confianza:</a:t>
+              <a:t>信任：</a:t>
             </a:r>
             <a:r>
               <a:rPr sz="2600" b="0">
@@ -5158,7 +5158,7 @@
                 </a:solidFill>
                 <a:latin typeface="Nunito Sans"/>
               </a:rPr>
-              <a:t> no hace falta vigilar</a:t>
+              <a:t>不需要监视</a:t>
             </a:r>
           </a:p>
           <a:p>
@@ -5183,7 +5183,7 @@
                 </a:solidFill>
                 <a:latin typeface="Nunito Sans"/>
               </a:rPr>
-              <a:t>Libertad:</a:t>
+              <a:t>自由：</a:t>
             </a:r>
             <a:r>
               <a:rPr sz="2600" b="0">
@@ -5192,7 +5192,7 @@
                 </a:solidFill>
                 <a:latin typeface="Nunito Sans"/>
               </a:rPr>
-              <a:t> tienes tu vida, tus amigos y tus aficiones</a:t>
+              <a:t>你有自己的生活、朋友和爱好</a:t>
             </a:r>
           </a:p>
         </p:txBody>
@@ -7347,7 +7347,7 @@
                 </a:solidFill>
                 <a:latin typeface="Nunito Sans"/>
               </a:rPr>
-              <a:t>Lo aprendemos de películas, canciones, series y redes</a:t>
+              <a:t>我们从电影、歌曲、剧集和社交网络里学到它</a:t>
             </a:r>
           </a:p>
           <a:p>
@@ -7372,7 +7372,7 @@
                 </a:solidFill>
                 <a:latin typeface="Nunito Sans"/>
               </a:rPr>
-              <a:t>Lo creemos por </a:t>
+              <a:t>我们相信它是出于</a:t>
             </a:r>
             <a:r>
               <a:rPr sz="2800" b="1">
@@ -7381,7 +7381,7 @@
                 </a:solidFill>
                 <a:latin typeface="Nunito Sans"/>
               </a:rPr>
-              <a:t>costumbre</a:t>
+              <a:t>习惯</a:t>
             </a:r>
             <a:r>
               <a:rPr sz="2800" b="0">
@@ -7390,7 +7390,7 @@
                 </a:solidFill>
                 <a:latin typeface="Nunito Sans"/>
               </a:rPr>
-              <a:t> y por el grupo （第5课）</a:t>
+              <a:t>和群体（第5课）</a:t>
             </a:r>
           </a:p>
           <a:p>
@@ -7415,7 +7415,7 @@
                 </a:solidFill>
                 <a:latin typeface="Nunito Sans"/>
               </a:rPr>
-              <a:t>La idea de la «otra mitad» ya sale en «El banquete», de Platón</a:t>
+              <a:t>“另一半”的想法早在柏拉图的《会饮篇》里就出现了</a:t>
             </a:r>
           </a:p>
           <a:p>
@@ -7440,7 +7440,7 @@
                 </a:solidFill>
                 <a:latin typeface="Nunito Sans"/>
               </a:rPr>
-              <a:t>El psicólogo Carlos Yela los estudió y clasificó en España</a:t>
+              <a:t>心理学家卡洛斯·耶拉（Carlos Yela）在西班牙研究并分类过这些迷思</a:t>
             </a:r>
           </a:p>
         </p:txBody>
@@ -8138,7 +8138,7 @@
                 </a:solidFill>
                 <a:latin typeface="Nunito Sans"/>
               </a:rPr>
-              <a:t>«Él protege y decide; ella espera y cede»</a:t>
+              <a:t>“他保护并做决定；她等待并让步”</a:t>
             </a:r>
           </a:p>
           <a:p>
@@ -8163,7 +8163,7 @@
                 </a:solidFill>
                 <a:latin typeface="Nunito Sans"/>
               </a:rPr>
-              <a:t>«Si un chico llora o pide ayuda, es débil»</a:t>
+              <a:t>“男生哭或求助，就是软弱”</a:t>
             </a:r>
           </a:p>
           <a:p>
@@ -8188,7 +8188,7 @@
                 </a:solidFill>
                 <a:latin typeface="Nunito Sans"/>
               </a:rPr>
-              <a:t>Son </a:t>
+              <a:t>这些是</a:t>
             </a:r>
             <a:r>
               <a:rPr sz="2800" b="1">
@@ -8197,7 +8197,7 @@
                 </a:solidFill>
                 <a:latin typeface="Nunito Sans"/>
               </a:rPr>
-              <a:t>estereotipos</a:t>
+              <a:t>刻板印象</a:t>
             </a:r>
             <a:r>
               <a:rPr sz="2800" b="0">
@@ -8206,7 +8206,7 @@
                 </a:solidFill>
                 <a:latin typeface="Nunito Sans"/>
               </a:rPr>
-              <a:t> （第45课）: no describen a las personas reales</a:t>
+              <a:t>（第45课）：它们并不能描述真实的人</a:t>
             </a:r>
           </a:p>
           <a:p>
@@ -8231,7 +8231,7 @@
                 </a:solidFill>
                 <a:latin typeface="Nunito Sans"/>
               </a:rPr>
-              <a:t>Hay muchas formas de relación, y no tener pareja también es una opción</a:t>
+              <a:t>恋爱关系有很多种形式，不谈恋爱也是一种选择</a:t>
             </a:r>
           </a:p>
         </p:txBody>
@@ -8483,7 +8483,7 @@
                 </a:solidFill>
                 <a:latin typeface="Nunito Sans"/>
               </a:rPr>
-              <a:t>Pedir la ubicación o «¿con quién estás?» a todas horas</a:t>
+              <a:t>随时要求对方发位置，或者问“你和谁在一起？”</a:t>
             </a:r>
           </a:p>
           <a:p>
@@ -8508,7 +8508,7 @@
                 </a:solidFill>
                 <a:latin typeface="Nunito Sans"/>
               </a:rPr>
-              <a:t>Decidir con quién quedas o qué ropa llevas</a:t>
+              <a:t>决定你和谁见面或穿什么衣服</a:t>
             </a:r>
           </a:p>
           <a:p>
@@ -8533,7 +8533,7 @@
                 </a:solidFill>
                 <a:latin typeface="Nunito Sans"/>
               </a:rPr>
-              <a:t>Pedir contraseñas o revisar el móvil</a:t>
+              <a:t>要密码或检查手机</a:t>
             </a:r>
           </a:p>
           <a:p>
@@ -8558,7 +8558,7 @@
                 </a:solidFill>
                 <a:latin typeface="Nunito Sans"/>
               </a:rPr>
-              <a:t>Enfadarse si no contestas enseguida</a:t>
+              <a:t>你没有马上回复就生气</a:t>
             </a:r>
           </a:p>
         </p:txBody>

--- a/curso/pptx/S79.pptx
+++ b/curso/pptx/S79.pptx
@@ -4233,7 +4233,7 @@
                 </a:solidFill>
                 <a:latin typeface="Nunito Sans"/>
               </a:rPr>
-              <a:t>Iker 每小时都给女朋友 Leire 发消息：“你在哪儿？和谁在一起？把位置发给我。”他还补充说：“这是因为我担心你。”（虚构的例子。）</a:t>
+              <a:t>一个男孩每小时都给女朋友发消息：“你在哪儿？和谁在一起？把位置发给我。”他还补充说：“这是因为我担心你。”（虚构的例子。）</a:t>
             </a:r>
           </a:p>
         </p:txBody>
@@ -4281,7 +4281,7 @@
                 </a:solidFill>
                 <a:latin typeface="Nunito Sans"/>
               </a:rPr>
-              <a:t>Iker 说了什么？说这是担心、是关爱。</a:t>
+              <a:t>这个男孩说了什么？说这是担心、是关爱。</a:t>
             </a:r>
           </a:p>
           <a:p>
@@ -4306,7 +4306,7 @@
                 </a:solidFill>
                 <a:latin typeface="Nunito Sans"/>
               </a:rPr>
-              <a:t>他做了什么？他随时监视 Leire 在哪里、和谁在一起。</a:t>
+              <a:t>他做了什么？他随时监视女朋友在哪里、和谁在一起。</a:t>
             </a:r>
           </a:p>
           <a:p>
@@ -4560,7 +4560,7 @@
                 </a:solidFill>
                 <a:latin typeface="Nunito Sans"/>
               </a:rPr>
-              <a:t>Naiara 看到男朋友 Omar 和一个女同学笑得很开心。她感到嫉妒。（虚构的例子。）</a:t>
+              <a:t>一个女孩看到男朋友和一个女同学笑得很开心。她感到嫉妒。（虚构的例子。）</a:t>
             </a:r>
           </a:p>
         </p:txBody>
@@ -4633,7 +4633,7 @@
                 </a:solidFill>
                 <a:latin typeface="Nunito Sans"/>
               </a:rPr>
-              <a:t>Naiara 怎么处理这种情绪是另一回事：她可以平静地谈一谈，也可以监视和禁止。</a:t>
+              <a:t>这个女孩怎么处理这种情绪是另一回事：她可以平静地谈一谈，也可以监视和禁止。</a:t>
             </a:r>
           </a:p>
           <a:p>
@@ -5378,7 +5378,7 @@
                 </a:solidFill>
                 <a:latin typeface="Nunito Sans"/>
               </a:rPr>
-              <a:t>Yasmin 和陈已经在一起一年了。他们不检查对方的手机，也不互相要密码。Maialen 认为：“这说明他们互相不信任。”</a:t>
+              <a:t>一个女孩和一个男孩已经在一起一年了。他们不检查对方的手机，也不互相要密码。另一个女孩认为：“这说明他们互相不信任。”</a:t>
             </a:r>
           </a:p>
         </p:txBody>
@@ -5426,7 +5426,7 @@
                 </a:solidFill>
                 <a:latin typeface="Nunito Sans"/>
               </a:rPr>
-              <a:t>Maialen 说得对吗？</a:t>
+              <a:t>另一个女孩说得对吗？</a:t>
             </a:r>
           </a:p>
           <a:p>
@@ -5519,7 +5519,7 @@
                 </a:solidFill>
                 <a:latin typeface="Nunito Sans"/>
               </a:rPr>
-              <a:t>Maialen 是怎么知道的？她从一个其实指向相反方向的事实里得出了结论。而且隐私是一种权利。</a:t>
+              <a:t>另一个女孩是怎么知道的？她从一个其实指向相反方向的事实里得出了结论。而且隐私是一种权利。</a:t>
             </a:r>
           </a:p>
           <a:p>
